--- a/lci_esom1.pptx
+++ b/lci_esom1.pptx
@@ -3517,34 +3517,6 @@
               <a:rPr/>
               <a:t>Stage IV Cancer of the Esophagus and GE Junction</a:t>
             </a:r>
-          </a:p>
-        </p:txBody>
-      </p:sp>
-      <p:sp>
-        <p:nvSpPr>
-          <p:cNvPr id="3" name="Subtitle 2"/>
-          <p:cNvSpPr>
-            <a:spLocks noGrp="1"/>
-          </p:cNvSpPr>
-          <p:nvPr>
-            <p:ph idx="1" type="subTitle"/>
-          </p:nvPr>
-        </p:nvSpPr>
-        <p:spPr>
-          <a:xfrm>
-            <a:off x="1371600" y="2914650"/>
-            <a:ext cx="6400800" cy="1314450"/>
-          </a:xfrm>
-        </p:spPr>
-        <p:txBody>
-          <a:bodyPr/>
-          <a:lstStyle/>
-          <a:p>
-            <a:pPr lvl="0" indent="0" marL="0">
-              <a:buNone/>
-            </a:pPr>
-            <a:br/>
-            <a:br/>
           </a:p>
         </p:txBody>
       </p:sp>
